--- a/session1/exam-strategy/q5/q5_exam_strategy.pptx
+++ b/session1/exam-strategy/q5/q5_exam_strategy.pptx
@@ -3189,8 +3189,8 @@
         </p:nvSpPr>
         <p:spPr>
           <a:xfrm>
-            <a:off x="274320" y="685800"/>
-            <a:ext cx="6400800" cy="1645920"/>
+            <a:off x="274320" y="640080"/>
+            <a:ext cx="6583680" cy="1280160"/>
           </a:xfrm>
           <a:prstGeom prst="rect">
             <a:avLst/>
@@ -3198,13 +3198,13 @@
           <a:noFill/>
         </p:spPr>
         <p:txBody>
-          <a:bodyPr wrap="square">
+          <a:bodyPr wrap="square" tIns="0" bIns="0">
             <a:spAutoFit/>
           </a:bodyPr>
           <a:lstStyle/>
           <a:p>
             <a:pPr>
-              <a:defRPr sz="1100">
+              <a:defRPr sz="900">
                 <a:solidFill>
                   <a:srgbClr val="FFFFFF"/>
                 </a:solidFill>
@@ -3212,7 +3212,7 @@
               </a:defRPr>
             </a:pPr>
             <a:r>
-              <a:t>A developer has built a three-tier application and needs to verify security group rules that have been setup by a security engineer: Presentation Tier - Accessed by users over the web, protected by the security group, presentation-sg Logic Tier - RESTful API accessed from the Presentation Tier via https, protected by the security group, logic-sg Data Tier - SQL Server database accessed over port 1433 from the Logic Tier, protected by the security group, data-sg What combination of the followi...</a:t>
+              <a:t>A developer has built a three-tier application and needs to verify security group rules that have been setup by a security engineer: Presentation Tier - Accessed by users over the web, protected by the security group, presentation-sg Logic Tier - RESTful API accessed from the Presentation Tier via https, protected by the security group, logic-sg...</a:t>
             </a:r>
           </a:p>
         </p:txBody>
@@ -3225,8 +3225,8 @@
         </p:nvSpPr>
         <p:spPr>
           <a:xfrm>
-            <a:off x="365760" y="2377440"/>
-            <a:ext cx="274320" cy="274320"/>
+            <a:off x="274320" y="2057400"/>
+            <a:ext cx="201168" cy="201168"/>
           </a:xfrm>
           <a:prstGeom prst="ellipse">
             <a:avLst/>
@@ -3257,7 +3257,7 @@
           <a:lstStyle/>
           <a:p>
             <a:pPr algn="ctr">
-              <a:defRPr sz="900" b="1">
+              <a:defRPr sz="700" b="1">
                 <a:solidFill>
                   <a:srgbClr val="FFFFFF"/>
                 </a:solidFill>
@@ -3277,8 +3277,8 @@
         </p:nvSpPr>
         <p:spPr>
           <a:xfrm>
-            <a:off x="777240" y="2377440"/>
-            <a:ext cx="5943600" cy="411480"/>
+            <a:off x="548640" y="2011680"/>
+            <a:ext cx="6400800" cy="484631"/>
           </a:xfrm>
           <a:prstGeom prst="rect">
             <a:avLst/>
@@ -3286,13 +3286,13 @@
           <a:noFill/>
         </p:spPr>
         <p:txBody>
-          <a:bodyPr wrap="square">
+          <a:bodyPr wrap="square" tIns="25400" bIns="0" lIns="0">
             <a:spAutoFit/>
           </a:bodyPr>
           <a:lstStyle/>
           <a:p>
             <a:pPr>
-              <a:defRPr sz="1000">
+              <a:defRPr sz="800">
                 <a:solidFill>
                   <a:srgbClr val="CCCCCC"/>
                 </a:solidFill>
@@ -3300,7 +3300,7 @@
               </a:defRPr>
             </a:pPr>
             <a:r>
-              <a:t>presentation-sg: Allow ports 80 and 443 from 0.0.0.0/0 - This rule allows access to the Presentation Tier over the web via HTTP (port 80) and HTTPS (port 443) from anywhere.</a:t>
+              <a:t>presentation-sg: Allow ports 80 and 443 from 0.0.0.0/0 - This rule allows access to the Pr...</a:t>
             </a:r>
           </a:p>
         </p:txBody>
@@ -3313,8 +3313,8 @@
         </p:nvSpPr>
         <p:spPr>
           <a:xfrm>
-            <a:off x="365760" y="2834640"/>
-            <a:ext cx="274320" cy="274320"/>
+            <a:off x="274320" y="2560320"/>
+            <a:ext cx="201168" cy="201168"/>
           </a:xfrm>
           <a:prstGeom prst="ellipse">
             <a:avLst/>
@@ -3345,7 +3345,7 @@
           <a:lstStyle/>
           <a:p>
             <a:pPr algn="ctr">
-              <a:defRPr sz="900" b="1">
+              <a:defRPr sz="700" b="1">
                 <a:solidFill>
                   <a:srgbClr val="FFFFFF"/>
                 </a:solidFill>
@@ -3365,8 +3365,8 @@
         </p:nvSpPr>
         <p:spPr>
           <a:xfrm>
-            <a:off x="777240" y="2834640"/>
-            <a:ext cx="5943600" cy="411480"/>
+            <a:off x="548640" y="2514600"/>
+            <a:ext cx="6400800" cy="484631"/>
           </a:xfrm>
           <a:prstGeom prst="rect">
             <a:avLst/>
@@ -3374,13 +3374,13 @@
           <a:noFill/>
         </p:spPr>
         <p:txBody>
-          <a:bodyPr wrap="square">
+          <a:bodyPr wrap="square" tIns="25400" bIns="0" lIns="0">
             <a:spAutoFit/>
           </a:bodyPr>
           <a:lstStyle/>
           <a:p>
             <a:pPr>
-              <a:defRPr sz="1000">
+              <a:defRPr sz="800">
                 <a:solidFill>
                   <a:srgbClr val="CCCCCC"/>
                 </a:solidFill>
@@ -3388,7 +3388,7 @@
               </a:defRPr>
             </a:pPr>
             <a:r>
-              <a:t>data-sg: Allow port 1433 from presentation-sg - This rule would allow access from the Presentation Tier to the Data Tier's SQL Server database, which is not the desired configuration according to the application's architecture.</a:t>
+              <a:t>data-sg: Allow port 1433 from presentation-sg - This rule would allow access from the Pres...</a:t>
             </a:r>
           </a:p>
         </p:txBody>
@@ -3401,8 +3401,8 @@
         </p:nvSpPr>
         <p:spPr>
           <a:xfrm>
-            <a:off x="365760" y="3291840"/>
-            <a:ext cx="274320" cy="274320"/>
+            <a:off x="274320" y="3063239"/>
+            <a:ext cx="201168" cy="201168"/>
           </a:xfrm>
           <a:prstGeom prst="ellipse">
             <a:avLst/>
@@ -3433,7 +3433,7 @@
           <a:lstStyle/>
           <a:p>
             <a:pPr algn="ctr">
-              <a:defRPr sz="900" b="1">
+              <a:defRPr sz="700" b="1">
                 <a:solidFill>
                   <a:srgbClr val="FFFFFF"/>
                 </a:solidFill>
@@ -3453,8 +3453,8 @@
         </p:nvSpPr>
         <p:spPr>
           <a:xfrm>
-            <a:off x="777240" y="3291840"/>
-            <a:ext cx="5943600" cy="411480"/>
+            <a:off x="548640" y="3017520"/>
+            <a:ext cx="6400800" cy="484631"/>
           </a:xfrm>
           <a:prstGeom prst="rect">
             <a:avLst/>
@@ -3462,13 +3462,13 @@
           <a:noFill/>
         </p:spPr>
         <p:txBody>
-          <a:bodyPr wrap="square">
+          <a:bodyPr wrap="square" tIns="25400" bIns="0" lIns="0">
             <a:spAutoFit/>
           </a:bodyPr>
           <a:lstStyle/>
           <a:p>
             <a:pPr>
-              <a:defRPr sz="1000">
+              <a:defRPr sz="800">
                 <a:solidFill>
                   <a:srgbClr val="CCCCCC"/>
                 </a:solidFill>
@@ -3476,7 +3476,7 @@
               </a:defRPr>
             </a:pPr>
             <a:r>
-              <a:t>data-sg: Allow port 1433 from logic-sg - This rule allows access to the Data Tier SQL Server database from the Logic Tier via port 1433, as required by the application architecture.</a:t>
+              <a:t>data-sg: Allow port 1433 from logic-sg - This rule allows access to the Data Tier SQL Serv...</a:t>
             </a:r>
           </a:p>
         </p:txBody>
@@ -3489,8 +3489,8 @@
         </p:nvSpPr>
         <p:spPr>
           <a:xfrm>
-            <a:off x="365760" y="3749039"/>
-            <a:ext cx="274320" cy="274320"/>
+            <a:off x="274320" y="3566160"/>
+            <a:ext cx="201168" cy="201168"/>
           </a:xfrm>
           <a:prstGeom prst="ellipse">
             <a:avLst/>
@@ -3521,7 +3521,7 @@
           <a:lstStyle/>
           <a:p>
             <a:pPr algn="ctr">
-              <a:defRPr sz="900" b="1">
+              <a:defRPr sz="700" b="1">
                 <a:solidFill>
                   <a:srgbClr val="FFFFFF"/>
                 </a:solidFill>
@@ -3541,8 +3541,8 @@
         </p:nvSpPr>
         <p:spPr>
           <a:xfrm>
-            <a:off x="777240" y="3749039"/>
-            <a:ext cx="5943600" cy="411480"/>
+            <a:off x="548640" y="3520440"/>
+            <a:ext cx="6400800" cy="484631"/>
           </a:xfrm>
           <a:prstGeom prst="rect">
             <a:avLst/>
@@ -3550,13 +3550,13 @@
           <a:noFill/>
         </p:spPr>
         <p:txBody>
-          <a:bodyPr wrap="square">
+          <a:bodyPr wrap="square" tIns="25400" bIns="0" lIns="0">
             <a:spAutoFit/>
           </a:bodyPr>
           <a:lstStyle/>
           <a:p>
             <a:pPr>
-              <a:defRPr sz="1000">
+              <a:defRPr sz="800">
                 <a:solidFill>
                   <a:srgbClr val="CCCCCC"/>
                 </a:solidFill>
@@ -3564,7 +3564,7 @@
               </a:defRPr>
             </a:pPr>
             <a:r>
-              <a:t>presentation-sg: Allow port 1433 from data-sg - This rule would allow access from the Data Tier to the Presentation Tier, which is not necessary for the application's functionality.</a:t>
+              <a:t>presentation-sg: Allow port 1433 from data-sg - This rule would allow access from the Data...</a:t>
             </a:r>
           </a:p>
         </p:txBody>
@@ -3577,8 +3577,8 @@
         </p:nvSpPr>
         <p:spPr>
           <a:xfrm>
-            <a:off x="365760" y="4206240"/>
-            <a:ext cx="274320" cy="274320"/>
+            <a:off x="274320" y="4069080"/>
+            <a:ext cx="201168" cy="201168"/>
           </a:xfrm>
           <a:prstGeom prst="ellipse">
             <a:avLst/>
@@ -3609,7 +3609,7 @@
           <a:lstStyle/>
           <a:p>
             <a:pPr algn="ctr">
-              <a:defRPr sz="900" b="1">
+              <a:defRPr sz="700" b="1">
                 <a:solidFill>
                   <a:srgbClr val="FFFFFF"/>
                 </a:solidFill>
@@ -3629,8 +3629,8 @@
         </p:nvSpPr>
         <p:spPr>
           <a:xfrm>
-            <a:off x="777240" y="4206240"/>
-            <a:ext cx="5943600" cy="411480"/>
+            <a:off x="548640" y="4023360"/>
+            <a:ext cx="6400800" cy="484631"/>
           </a:xfrm>
           <a:prstGeom prst="rect">
             <a:avLst/>
@@ -3638,13 +3638,13 @@
           <a:noFill/>
         </p:spPr>
         <p:txBody>
-          <a:bodyPr wrap="square">
+          <a:bodyPr wrap="square" tIns="25400" bIns="0" lIns="0">
             <a:spAutoFit/>
           </a:bodyPr>
           <a:lstStyle/>
           <a:p>
             <a:pPr>
-              <a:defRPr sz="1000">
+              <a:defRPr sz="800">
                 <a:solidFill>
                   <a:srgbClr val="CCCCCC"/>
                 </a:solidFill>
@@ -3652,7 +3652,7 @@
               </a:defRPr>
             </a:pPr>
             <a:r>
-              <a:t>logic-sg: Allow port 443 from presentation-sg - This rule allows access to the Logic Tier RESTful API from the Presentation Tier via HTTPS (port 443).</a:t>
+              <a:t>logic-sg: Allow port 443 from presentation-sg - This rule allows access to the Logic Tier ...</a:t>
             </a:r>
           </a:p>
         </p:txBody>
@@ -3665,8 +3665,8 @@
         </p:nvSpPr>
         <p:spPr>
           <a:xfrm>
-            <a:off x="365760" y="4663440"/>
-            <a:ext cx="274320" cy="274320"/>
+            <a:off x="274320" y="4571999"/>
+            <a:ext cx="201168" cy="201168"/>
           </a:xfrm>
           <a:prstGeom prst="ellipse">
             <a:avLst/>
@@ -3697,7 +3697,7 @@
           <a:lstStyle/>
           <a:p>
             <a:pPr algn="ctr">
-              <a:defRPr sz="900" b="1">
+              <a:defRPr sz="700" b="1">
                 <a:solidFill>
                   <a:srgbClr val="FFFFFF"/>
                 </a:solidFill>
@@ -3717,8 +3717,8 @@
         </p:nvSpPr>
         <p:spPr>
           <a:xfrm>
-            <a:off x="777240" y="4663440"/>
-            <a:ext cx="5943600" cy="411480"/>
+            <a:off x="548640" y="4526279"/>
+            <a:ext cx="6400800" cy="484631"/>
           </a:xfrm>
           <a:prstGeom prst="rect">
             <a:avLst/>
@@ -3726,13 +3726,13 @@
           <a:noFill/>
         </p:spPr>
         <p:txBody>
-          <a:bodyPr wrap="square">
+          <a:bodyPr wrap="square" tIns="25400" bIns="0" lIns="0">
             <a:spAutoFit/>
           </a:bodyPr>
           <a:lstStyle/>
           <a:p>
             <a:pPr>
-              <a:defRPr sz="1000">
+              <a:defRPr sz="800">
                 <a:solidFill>
                   <a:srgbClr val="CCCCCC"/>
                 </a:solidFill>
@@ -3740,7 +3740,7 @@
               </a:defRPr>
             </a:pPr>
             <a:r>
-              <a:t>logic-sg: Allow port 443 from 0.0.0.0/0 - This rule would allow access to the Logic Tier RESTful API over HTTPS from anywhere, which may not align with the desired security posture.</a:t>
+              <a:t>logic-sg: Allow port 443 from 0.0.0.0/0 - This rule would allow access to the Logic Tier R...</a:t>
             </a:r>
           </a:p>
         </p:txBody>
@@ -4022,8 +4022,8 @@
         </p:blipFill>
         <p:spPr>
           <a:xfrm>
-            <a:off x="182880" y="914400"/>
-            <a:ext cx="3115683" cy="3840480"/>
+            <a:off x="182880" y="1678509"/>
+            <a:ext cx="5303520" cy="2312261"/>
           </a:xfrm>
           <a:prstGeom prst="rect">
             <a:avLst/>
@@ -4158,9 +4158,9 @@
           <a:p>
             <a:pPr>
               <a:spcAft>
-                <a:spcPts val="600"/>
+                <a:spcPts val="400"/>
               </a:spcAft>
-              <a:defRPr sz="900">
+              <a:defRPr sz="800">
                 <a:solidFill>
                   <a:srgbClr val="212121"/>
                 </a:solidFill>
@@ -4168,23 +4168,7 @@
               </a:defRPr>
             </a:pPr>
             <a:r>
-              <a:t>• presentation-sg: Allow ports 80 and 443 from 0.</a:t>
-            </a:r>
-          </a:p>
-          <a:p>
-            <a:pPr>
-              <a:spcAft>
-                <a:spcPts val="600"/>
-              </a:spcAft>
-              <a:defRPr sz="900">
-                <a:solidFill>
-                  <a:srgbClr val="212121"/>
-                </a:solidFill>
-                <a:latin typeface="Segoe UI"/>
-              </a:defRPr>
-            </a:pPr>
-            <a:r>
-              <a:t>• 0.0.0/0 - This rule allows access to the Presentation Tier over the web via HTTP (port 80) and HTTPS (port 443) from anywhere.</a:t>
+              <a:t>• Presentation-sg: Allow ports 80 and 443 from 0.0.0.0/0 - This rule allows access to the Presentation Tier over the web via HTTP (port 80) and HTTPS (port 443) from anywhere</a:t>
             </a:r>
           </a:p>
         </p:txBody>
@@ -4363,8 +4347,8 @@
         </p:blipFill>
         <p:spPr>
           <a:xfrm>
-            <a:off x="182880" y="914400"/>
-            <a:ext cx="3228638" cy="3840480"/>
+            <a:off x="182880" y="1275475"/>
+            <a:ext cx="5303520" cy="3118328"/>
           </a:xfrm>
           <a:prstGeom prst="rect">
             <a:avLst/>
@@ -4499,9 +4483,9 @@
           <a:p>
             <a:pPr>
               <a:spcAft>
-                <a:spcPts val="600"/>
+                <a:spcPts val="400"/>
               </a:spcAft>
-              <a:defRPr sz="900">
+              <a:defRPr sz="800">
                 <a:solidFill>
                   <a:srgbClr val="212121"/>
                 </a:solidFill>
@@ -4509,7 +4493,23 @@
               </a:defRPr>
             </a:pPr>
             <a:r>
-              <a:t>• data-sg: Allow port 1433 from presentation-sg - This rule would allow access from the Presentation Tier to the Data Tier's SQL Server database, which is not the desired configuration according to the application's architecture.</a:t>
+              <a:t>• Data-sg: Allow port 1433 from presentation-sg - This rule would allow access from the Presentation Tier to the Data Tier's SQL Server database</a:t>
+            </a:r>
+          </a:p>
+          <a:p>
+            <a:pPr>
+              <a:spcAft>
+                <a:spcPts val="400"/>
+              </a:spcAft>
+              <a:defRPr sz="800">
+                <a:solidFill>
+                  <a:srgbClr val="212121"/>
+                </a:solidFill>
+                <a:latin typeface="Segoe UI"/>
+              </a:defRPr>
+            </a:pPr>
+            <a:r>
+              <a:t>• Is not the desired configuration according to the application's architecture</a:t>
             </a:r>
           </a:p>
         </p:txBody>
@@ -4688,8 +4688,8 @@
         </p:blipFill>
         <p:spPr>
           <a:xfrm>
-            <a:off x="182880" y="914400"/>
-            <a:ext cx="3115683" cy="3840480"/>
+            <a:off x="182880" y="1151368"/>
+            <a:ext cx="5303520" cy="3366543"/>
           </a:xfrm>
           <a:prstGeom prst="rect">
             <a:avLst/>
@@ -4824,9 +4824,9 @@
           <a:p>
             <a:pPr>
               <a:spcAft>
-                <a:spcPts val="600"/>
+                <a:spcPts val="400"/>
               </a:spcAft>
-              <a:defRPr sz="900">
+              <a:defRPr sz="800">
                 <a:solidFill>
                   <a:srgbClr val="212121"/>
                 </a:solidFill>
@@ -4834,7 +4834,23 @@
               </a:defRPr>
             </a:pPr>
             <a:r>
-              <a:t>• data-sg: Allow port 1433 from logic-sg - This rule allows access to the Data Tier SQL Server database from the Logic Tier via port 1433, as required by the application architecture.</a:t>
+              <a:t>• Data-sg: Allow port 1433 from logic-sg - This rule allows access to the Data Tier SQL Server database from the Logic Tier via port 1433</a:t>
+            </a:r>
+          </a:p>
+          <a:p>
+            <a:pPr>
+              <a:spcAft>
+                <a:spcPts val="400"/>
+              </a:spcAft>
+              <a:defRPr sz="800">
+                <a:solidFill>
+                  <a:srgbClr val="212121"/>
+                </a:solidFill>
+                <a:latin typeface="Segoe UI"/>
+              </a:defRPr>
+            </a:pPr>
+            <a:r>
+              <a:t>• As required by the application architecture</a:t>
             </a:r>
           </a:p>
         </p:txBody>
@@ -5013,8 +5029,8 @@
         </p:blipFill>
         <p:spPr>
           <a:xfrm>
-            <a:off x="182880" y="914400"/>
-            <a:ext cx="3238051" cy="3840480"/>
+            <a:off x="182880" y="1321331"/>
+            <a:ext cx="5303520" cy="3026616"/>
           </a:xfrm>
           <a:prstGeom prst="rect">
             <a:avLst/>
@@ -5149,9 +5165,9 @@
           <a:p>
             <a:pPr>
               <a:spcAft>
-                <a:spcPts val="600"/>
+                <a:spcPts val="400"/>
               </a:spcAft>
-              <a:defRPr sz="900">
+              <a:defRPr sz="800">
                 <a:solidFill>
                   <a:srgbClr val="212121"/>
                 </a:solidFill>
@@ -5159,7 +5175,23 @@
               </a:defRPr>
             </a:pPr>
             <a:r>
-              <a:t>• presentation-sg: Allow port 1433 from data-sg - This rule would allow access from the Data Tier to the Presentation Tier, which is not necessary for the application's functionality.</a:t>
+              <a:t>• Presentation-sg: Allow port 1433 from data-sg - This rule would allow access from the Data Tier to the Presentation Tier</a:t>
+            </a:r>
+          </a:p>
+          <a:p>
+            <a:pPr>
+              <a:spcAft>
+                <a:spcPts val="400"/>
+              </a:spcAft>
+              <a:defRPr sz="800">
+                <a:solidFill>
+                  <a:srgbClr val="212121"/>
+                </a:solidFill>
+                <a:latin typeface="Segoe UI"/>
+              </a:defRPr>
+            </a:pPr>
+            <a:r>
+              <a:t>• Is not necessary for the application's functionality</a:t>
             </a:r>
           </a:p>
         </p:txBody>
@@ -5338,8 +5370,8 @@
         </p:blipFill>
         <p:spPr>
           <a:xfrm>
-            <a:off x="182880" y="914400"/>
-            <a:ext cx="3115683" cy="3840480"/>
+            <a:off x="182880" y="1208198"/>
+            <a:ext cx="5303520" cy="3252882"/>
           </a:xfrm>
           <a:prstGeom prst="rect">
             <a:avLst/>
@@ -5474,9 +5506,9 @@
           <a:p>
             <a:pPr>
               <a:spcAft>
-                <a:spcPts val="600"/>
+                <a:spcPts val="400"/>
               </a:spcAft>
-              <a:defRPr sz="900">
+              <a:defRPr sz="800">
                 <a:solidFill>
                   <a:srgbClr val="212121"/>
                 </a:solidFill>
@@ -5484,7 +5516,7 @@
               </a:defRPr>
             </a:pPr>
             <a:r>
-              <a:t>• logic-sg: Allow port 443 from presentation-sg - This rule allows access to the Logic Tier RESTful API from the Presentation Tier via HTTPS (port 443).</a:t>
+              <a:t>• Logic-sg: Allow port 443 from presentation-sg - This rule allows access to the Logic Tier RESTful API from the Presentation Tier via HTTPS (port 443)</a:t>
             </a:r>
           </a:p>
         </p:txBody>
@@ -5664,7 +5696,7 @@
         <p:spPr>
           <a:xfrm>
             <a:off x="182880" y="914400"/>
-            <a:ext cx="3200400" cy="3840480"/>
+            <a:ext cx="3950207" cy="3840480"/>
           </a:xfrm>
           <a:prstGeom prst="rect">
             <a:avLst/>
@@ -5799,9 +5831,9 @@
           <a:p>
             <a:pPr>
               <a:spcAft>
-                <a:spcPts val="600"/>
+                <a:spcPts val="400"/>
               </a:spcAft>
-              <a:defRPr sz="900">
+              <a:defRPr sz="800">
                 <a:solidFill>
                   <a:srgbClr val="212121"/>
                 </a:solidFill>
@@ -5809,15 +5841,15 @@
               </a:defRPr>
             </a:pPr>
             <a:r>
-              <a:t>• logic-sg: Allow port 443 from 0.</a:t>
+              <a:t>• Logic-sg: Allow port 443 from 0.0.0.0/0 - This rule would allow access to the Logic Tier RESTful API over HTTPS from anywhere</a:t>
             </a:r>
           </a:p>
           <a:p>
             <a:pPr>
               <a:spcAft>
-                <a:spcPts val="600"/>
+                <a:spcPts val="400"/>
               </a:spcAft>
-              <a:defRPr sz="900">
+              <a:defRPr sz="800">
                 <a:solidFill>
                   <a:srgbClr val="212121"/>
                 </a:solidFill>
@@ -5825,7 +5857,7 @@
               </a:defRPr>
             </a:pPr>
             <a:r>
-              <a:t>• 0.0.0/0 - This rule would allow access to the Logic Tier RESTful API over HTTPS from anywhere, which may not align with the desired security posture.</a:t>
+              <a:t>• May not align with the desired security posture</a:t>
             </a:r>
           </a:p>
         </p:txBody>

--- a/session1/exam-strategy/q5/q5_exam_strategy.pptx
+++ b/session1/exam-strategy/q5/q5_exam_strategy.pptx
@@ -3189,8 +3189,8 @@
         </p:nvSpPr>
         <p:spPr>
           <a:xfrm>
-            <a:off x="274320" y="640080"/>
-            <a:ext cx="6583680" cy="1280160"/>
+            <a:off x="274320" y="685800"/>
+            <a:ext cx="6400800" cy="1645920"/>
           </a:xfrm>
           <a:prstGeom prst="rect">
             <a:avLst/>
@@ -3198,13 +3198,13 @@
           <a:noFill/>
         </p:spPr>
         <p:txBody>
-          <a:bodyPr wrap="square" tIns="0" bIns="0">
+          <a:bodyPr wrap="square">
             <a:spAutoFit/>
           </a:bodyPr>
           <a:lstStyle/>
           <a:p>
             <a:pPr>
-              <a:defRPr sz="900">
+              <a:defRPr sz="1100">
                 <a:solidFill>
                   <a:srgbClr val="FFFFFF"/>
                 </a:solidFill>
@@ -3212,7 +3212,7 @@
               </a:defRPr>
             </a:pPr>
             <a:r>
-              <a:t>A developer has built a three-tier application and needs to verify security group rules that have been setup by a security engineer: Presentation Tier - Accessed by users over the web, protected by the security group, presentation-sg Logic Tier - RESTful API accessed from the Presentation Tier via https, protected by the security group, logic-sg...</a:t>
+              <a:t>A developer has built a three-tier application and needs to verify security group rules that have been setup by a security engineer: Presentation Tier - Accessed by users over the web, protected by the security group, presentation-sg Logic Tier - RESTful API accessed from the Presentation Tier via https, protected by the security group, logic-sg Data Tier - SQL Server database accessed over port 1433 from the Logic Tier, protected by the security group, data-sg What combination of the followi...</a:t>
             </a:r>
           </a:p>
         </p:txBody>
@@ -3225,8 +3225,8 @@
         </p:nvSpPr>
         <p:spPr>
           <a:xfrm>
-            <a:off x="274320" y="2057400"/>
-            <a:ext cx="201168" cy="201168"/>
+            <a:off x="365760" y="2377440"/>
+            <a:ext cx="274320" cy="274320"/>
           </a:xfrm>
           <a:prstGeom prst="ellipse">
             <a:avLst/>
@@ -3257,7 +3257,7 @@
           <a:lstStyle/>
           <a:p>
             <a:pPr algn="ctr">
-              <a:defRPr sz="700" b="1">
+              <a:defRPr sz="900" b="1">
                 <a:solidFill>
                   <a:srgbClr val="FFFFFF"/>
                 </a:solidFill>
@@ -3277,8 +3277,8 @@
         </p:nvSpPr>
         <p:spPr>
           <a:xfrm>
-            <a:off x="548640" y="2011680"/>
-            <a:ext cx="6400800" cy="484631"/>
+            <a:off x="777240" y="2377440"/>
+            <a:ext cx="5943600" cy="411480"/>
           </a:xfrm>
           <a:prstGeom prst="rect">
             <a:avLst/>
@@ -3286,13 +3286,13 @@
           <a:noFill/>
         </p:spPr>
         <p:txBody>
-          <a:bodyPr wrap="square" tIns="25400" bIns="0" lIns="0">
+          <a:bodyPr wrap="square">
             <a:spAutoFit/>
           </a:bodyPr>
           <a:lstStyle/>
           <a:p>
             <a:pPr>
-              <a:defRPr sz="800">
+              <a:defRPr sz="1000">
                 <a:solidFill>
                   <a:srgbClr val="CCCCCC"/>
                 </a:solidFill>
@@ -3300,7 +3300,7 @@
               </a:defRPr>
             </a:pPr>
             <a:r>
-              <a:t>presentation-sg: Allow ports 80 and 443 from 0.0.0.0/0 - This rule allows access to the Pr...</a:t>
+              <a:t>presentation-sg: Allow ports 80 and 443 from 0.0.0.0/0 - This rule allows access to the Presentation Tier over the web via HTTP (port 80) and HTTPS (port 443) from anywhere.</a:t>
             </a:r>
           </a:p>
         </p:txBody>
@@ -3313,8 +3313,8 @@
         </p:nvSpPr>
         <p:spPr>
           <a:xfrm>
-            <a:off x="274320" y="2560320"/>
-            <a:ext cx="201168" cy="201168"/>
+            <a:off x="365760" y="2834640"/>
+            <a:ext cx="274320" cy="274320"/>
           </a:xfrm>
           <a:prstGeom prst="ellipse">
             <a:avLst/>
@@ -3345,7 +3345,7 @@
           <a:lstStyle/>
           <a:p>
             <a:pPr algn="ctr">
-              <a:defRPr sz="700" b="1">
+              <a:defRPr sz="900" b="1">
                 <a:solidFill>
                   <a:srgbClr val="FFFFFF"/>
                 </a:solidFill>
@@ -3365,8 +3365,8 @@
         </p:nvSpPr>
         <p:spPr>
           <a:xfrm>
-            <a:off x="548640" y="2514600"/>
-            <a:ext cx="6400800" cy="484631"/>
+            <a:off x="777240" y="2834640"/>
+            <a:ext cx="5943600" cy="411480"/>
           </a:xfrm>
           <a:prstGeom prst="rect">
             <a:avLst/>
@@ -3374,13 +3374,13 @@
           <a:noFill/>
         </p:spPr>
         <p:txBody>
-          <a:bodyPr wrap="square" tIns="25400" bIns="0" lIns="0">
+          <a:bodyPr wrap="square">
             <a:spAutoFit/>
           </a:bodyPr>
           <a:lstStyle/>
           <a:p>
             <a:pPr>
-              <a:defRPr sz="800">
+              <a:defRPr sz="1000">
                 <a:solidFill>
                   <a:srgbClr val="CCCCCC"/>
                 </a:solidFill>
@@ -3388,7 +3388,7 @@
               </a:defRPr>
             </a:pPr>
             <a:r>
-              <a:t>data-sg: Allow port 1433 from presentation-sg - This rule would allow access from the Pres...</a:t>
+              <a:t>data-sg: Allow port 1433 from presentation-sg - This rule would allow access from the Presentation Tier to the Data Tier's SQL Server database, which is not the desired configuration according to the application's architecture.</a:t>
             </a:r>
           </a:p>
         </p:txBody>
@@ -3401,8 +3401,8 @@
         </p:nvSpPr>
         <p:spPr>
           <a:xfrm>
-            <a:off x="274320" y="3063239"/>
-            <a:ext cx="201168" cy="201168"/>
+            <a:off x="365760" y="3291840"/>
+            <a:ext cx="274320" cy="274320"/>
           </a:xfrm>
           <a:prstGeom prst="ellipse">
             <a:avLst/>
@@ -3433,7 +3433,7 @@
           <a:lstStyle/>
           <a:p>
             <a:pPr algn="ctr">
-              <a:defRPr sz="700" b="1">
+              <a:defRPr sz="900" b="1">
                 <a:solidFill>
                   <a:srgbClr val="FFFFFF"/>
                 </a:solidFill>
@@ -3453,8 +3453,8 @@
         </p:nvSpPr>
         <p:spPr>
           <a:xfrm>
-            <a:off x="548640" y="3017520"/>
-            <a:ext cx="6400800" cy="484631"/>
+            <a:off x="777240" y="3291840"/>
+            <a:ext cx="5943600" cy="411480"/>
           </a:xfrm>
           <a:prstGeom prst="rect">
             <a:avLst/>
@@ -3462,13 +3462,13 @@
           <a:noFill/>
         </p:spPr>
         <p:txBody>
-          <a:bodyPr wrap="square" tIns="25400" bIns="0" lIns="0">
+          <a:bodyPr wrap="square">
             <a:spAutoFit/>
           </a:bodyPr>
           <a:lstStyle/>
           <a:p>
             <a:pPr>
-              <a:defRPr sz="800">
+              <a:defRPr sz="1000">
                 <a:solidFill>
                   <a:srgbClr val="CCCCCC"/>
                 </a:solidFill>
@@ -3476,7 +3476,7 @@
               </a:defRPr>
             </a:pPr>
             <a:r>
-              <a:t>data-sg: Allow port 1433 from logic-sg - This rule allows access to the Data Tier SQL Serv...</a:t>
+              <a:t>data-sg: Allow port 1433 from logic-sg - This rule allows access to the Data Tier SQL Server database from the Logic Tier via port 1433, as required by the application architecture.</a:t>
             </a:r>
           </a:p>
         </p:txBody>
@@ -3489,8 +3489,8 @@
         </p:nvSpPr>
         <p:spPr>
           <a:xfrm>
-            <a:off x="274320" y="3566160"/>
-            <a:ext cx="201168" cy="201168"/>
+            <a:off x="365760" y="3749039"/>
+            <a:ext cx="274320" cy="274320"/>
           </a:xfrm>
           <a:prstGeom prst="ellipse">
             <a:avLst/>
@@ -3521,7 +3521,7 @@
           <a:lstStyle/>
           <a:p>
             <a:pPr algn="ctr">
-              <a:defRPr sz="700" b="1">
+              <a:defRPr sz="900" b="1">
                 <a:solidFill>
                   <a:srgbClr val="FFFFFF"/>
                 </a:solidFill>
@@ -3541,8 +3541,8 @@
         </p:nvSpPr>
         <p:spPr>
           <a:xfrm>
-            <a:off x="548640" y="3520440"/>
-            <a:ext cx="6400800" cy="484631"/>
+            <a:off x="777240" y="3749039"/>
+            <a:ext cx="5943600" cy="411480"/>
           </a:xfrm>
           <a:prstGeom prst="rect">
             <a:avLst/>
@@ -3550,13 +3550,13 @@
           <a:noFill/>
         </p:spPr>
         <p:txBody>
-          <a:bodyPr wrap="square" tIns="25400" bIns="0" lIns="0">
+          <a:bodyPr wrap="square">
             <a:spAutoFit/>
           </a:bodyPr>
           <a:lstStyle/>
           <a:p>
             <a:pPr>
-              <a:defRPr sz="800">
+              <a:defRPr sz="1000">
                 <a:solidFill>
                   <a:srgbClr val="CCCCCC"/>
                 </a:solidFill>
@@ -3564,7 +3564,7 @@
               </a:defRPr>
             </a:pPr>
             <a:r>
-              <a:t>presentation-sg: Allow port 1433 from data-sg - This rule would allow access from the Data...</a:t>
+              <a:t>presentation-sg: Allow port 1433 from data-sg - This rule would allow access from the Data Tier to the Presentation Tier, which is not necessary for the application's functionality.</a:t>
             </a:r>
           </a:p>
         </p:txBody>
@@ -3577,8 +3577,8 @@
         </p:nvSpPr>
         <p:spPr>
           <a:xfrm>
-            <a:off x="274320" y="4069080"/>
-            <a:ext cx="201168" cy="201168"/>
+            <a:off x="365760" y="4206240"/>
+            <a:ext cx="274320" cy="274320"/>
           </a:xfrm>
           <a:prstGeom prst="ellipse">
             <a:avLst/>
@@ -3609,7 +3609,7 @@
           <a:lstStyle/>
           <a:p>
             <a:pPr algn="ctr">
-              <a:defRPr sz="700" b="1">
+              <a:defRPr sz="900" b="1">
                 <a:solidFill>
                   <a:srgbClr val="FFFFFF"/>
                 </a:solidFill>
@@ -3629,8 +3629,8 @@
         </p:nvSpPr>
         <p:spPr>
           <a:xfrm>
-            <a:off x="548640" y="4023360"/>
-            <a:ext cx="6400800" cy="484631"/>
+            <a:off x="777240" y="4206240"/>
+            <a:ext cx="5943600" cy="411480"/>
           </a:xfrm>
           <a:prstGeom prst="rect">
             <a:avLst/>
@@ -3638,13 +3638,13 @@
           <a:noFill/>
         </p:spPr>
         <p:txBody>
-          <a:bodyPr wrap="square" tIns="25400" bIns="0" lIns="0">
+          <a:bodyPr wrap="square">
             <a:spAutoFit/>
           </a:bodyPr>
           <a:lstStyle/>
           <a:p>
             <a:pPr>
-              <a:defRPr sz="800">
+              <a:defRPr sz="1000">
                 <a:solidFill>
                   <a:srgbClr val="CCCCCC"/>
                 </a:solidFill>
@@ -3652,7 +3652,7 @@
               </a:defRPr>
             </a:pPr>
             <a:r>
-              <a:t>logic-sg: Allow port 443 from presentation-sg - This rule allows access to the Logic Tier ...</a:t>
+              <a:t>logic-sg: Allow port 443 from presentation-sg - This rule allows access to the Logic Tier RESTful API from the Presentation Tier via HTTPS (port 443).</a:t>
             </a:r>
           </a:p>
         </p:txBody>
@@ -3665,8 +3665,8 @@
         </p:nvSpPr>
         <p:spPr>
           <a:xfrm>
-            <a:off x="274320" y="4571999"/>
-            <a:ext cx="201168" cy="201168"/>
+            <a:off x="365760" y="4663440"/>
+            <a:ext cx="274320" cy="274320"/>
           </a:xfrm>
           <a:prstGeom prst="ellipse">
             <a:avLst/>
@@ -3697,7 +3697,7 @@
           <a:lstStyle/>
           <a:p>
             <a:pPr algn="ctr">
-              <a:defRPr sz="700" b="1">
+              <a:defRPr sz="900" b="1">
                 <a:solidFill>
                   <a:srgbClr val="FFFFFF"/>
                 </a:solidFill>
@@ -3717,8 +3717,8 @@
         </p:nvSpPr>
         <p:spPr>
           <a:xfrm>
-            <a:off x="548640" y="4526279"/>
-            <a:ext cx="6400800" cy="484631"/>
+            <a:off x="777240" y="4663440"/>
+            <a:ext cx="5943600" cy="411480"/>
           </a:xfrm>
           <a:prstGeom prst="rect">
             <a:avLst/>
@@ -3726,13 +3726,13 @@
           <a:noFill/>
         </p:spPr>
         <p:txBody>
-          <a:bodyPr wrap="square" tIns="25400" bIns="0" lIns="0">
+          <a:bodyPr wrap="square">
             <a:spAutoFit/>
           </a:bodyPr>
           <a:lstStyle/>
           <a:p>
             <a:pPr>
-              <a:defRPr sz="800">
+              <a:defRPr sz="1000">
                 <a:solidFill>
                   <a:srgbClr val="CCCCCC"/>
                 </a:solidFill>
@@ -3740,7 +3740,7 @@
               </a:defRPr>
             </a:pPr>
             <a:r>
-              <a:t>logic-sg: Allow port 443 from 0.0.0.0/0 - This rule would allow access to the Logic Tier R...</a:t>
+              <a:t>logic-sg: Allow port 443 from 0.0.0.0/0 - This rule would allow access to the Logic Tier RESTful API over HTTPS from anywhere, which may not align with the desired security posture.</a:t>
             </a:r>
           </a:p>
         </p:txBody>
@@ -4022,8 +4022,8 @@
         </p:blipFill>
         <p:spPr>
           <a:xfrm>
-            <a:off x="182880" y="1678509"/>
-            <a:ext cx="5303520" cy="2312261"/>
+            <a:off x="182880" y="1196052"/>
+            <a:ext cx="5303520" cy="3277175"/>
           </a:xfrm>
           <a:prstGeom prst="rect">
             <a:avLst/>
@@ -4158,9 +4158,9 @@
           <a:p>
             <a:pPr>
               <a:spcAft>
-                <a:spcPts val="400"/>
+                <a:spcPts val="600"/>
               </a:spcAft>
-              <a:defRPr sz="800">
+              <a:defRPr sz="900">
                 <a:solidFill>
                   <a:srgbClr val="212121"/>
                 </a:solidFill>
@@ -4168,7 +4168,23 @@
               </a:defRPr>
             </a:pPr>
             <a:r>
-              <a:t>• Presentation-sg: Allow ports 80 and 443 from 0.0.0.0/0 - This rule allows access to the Presentation Tier over the web via HTTP (port 80) and HTTPS (port 443) from anywhere</a:t>
+              <a:t>• presentation-sg: Allow ports 80 and 443 from 0.</a:t>
+            </a:r>
+          </a:p>
+          <a:p>
+            <a:pPr>
+              <a:spcAft>
+                <a:spcPts val="600"/>
+              </a:spcAft>
+              <a:defRPr sz="900">
+                <a:solidFill>
+                  <a:srgbClr val="212121"/>
+                </a:solidFill>
+                <a:latin typeface="Segoe UI"/>
+              </a:defRPr>
+            </a:pPr>
+            <a:r>
+              <a:t>• 0.0.0/0 - This rule allows access to the Presentation Tier over the web via HTTP (port 80) and HTTPS (port 443) from anywhere.</a:t>
             </a:r>
           </a:p>
         </p:txBody>
@@ -4347,8 +4363,8 @@
         </p:blipFill>
         <p:spPr>
           <a:xfrm>
-            <a:off x="182880" y="1275475"/>
-            <a:ext cx="5303520" cy="3118328"/>
+            <a:off x="182880" y="914400"/>
+            <a:ext cx="5241247" cy="3840480"/>
           </a:xfrm>
           <a:prstGeom prst="rect">
             <a:avLst/>
@@ -4483,9 +4499,9 @@
           <a:p>
             <a:pPr>
               <a:spcAft>
-                <a:spcPts val="400"/>
+                <a:spcPts val="600"/>
               </a:spcAft>
-              <a:defRPr sz="800">
+              <a:defRPr sz="900">
                 <a:solidFill>
                   <a:srgbClr val="212121"/>
                 </a:solidFill>
@@ -4493,23 +4509,7 @@
               </a:defRPr>
             </a:pPr>
             <a:r>
-              <a:t>• Data-sg: Allow port 1433 from presentation-sg - This rule would allow access from the Presentation Tier to the Data Tier's SQL Server database</a:t>
-            </a:r>
-          </a:p>
-          <a:p>
-            <a:pPr>
-              <a:spcAft>
-                <a:spcPts val="400"/>
-              </a:spcAft>
-              <a:defRPr sz="800">
-                <a:solidFill>
-                  <a:srgbClr val="212121"/>
-                </a:solidFill>
-                <a:latin typeface="Segoe UI"/>
-              </a:defRPr>
-            </a:pPr>
-            <a:r>
-              <a:t>• Is not the desired configuration according to the application's architecture</a:t>
+              <a:t>• data-sg: Allow port 1433 from presentation-sg - This rule would allow access from the Presentation Tier to the Data Tier's SQL Server database, which is not the desired configuration according to the application's architecture.</a:t>
             </a:r>
           </a:p>
         </p:txBody>
@@ -4688,8 +4688,8 @@
         </p:blipFill>
         <p:spPr>
           <a:xfrm>
-            <a:off x="182880" y="1151368"/>
-            <a:ext cx="5303520" cy="3366543"/>
+            <a:off x="182880" y="1020642"/>
+            <a:ext cx="5303520" cy="3627995"/>
           </a:xfrm>
           <a:prstGeom prst="rect">
             <a:avLst/>
@@ -4824,9 +4824,9 @@
           <a:p>
             <a:pPr>
               <a:spcAft>
-                <a:spcPts val="400"/>
+                <a:spcPts val="600"/>
               </a:spcAft>
-              <a:defRPr sz="800">
+              <a:defRPr sz="900">
                 <a:solidFill>
                   <a:srgbClr val="212121"/>
                 </a:solidFill>
@@ -4834,23 +4834,7 @@
               </a:defRPr>
             </a:pPr>
             <a:r>
-              <a:t>• Data-sg: Allow port 1433 from logic-sg - This rule allows access to the Data Tier SQL Server database from the Logic Tier via port 1433</a:t>
-            </a:r>
-          </a:p>
-          <a:p>
-            <a:pPr>
-              <a:spcAft>
-                <a:spcPts val="400"/>
-              </a:spcAft>
-              <a:defRPr sz="800">
-                <a:solidFill>
-                  <a:srgbClr val="212121"/>
-                </a:solidFill>
-                <a:latin typeface="Segoe UI"/>
-              </a:defRPr>
-            </a:pPr>
-            <a:r>
-              <a:t>• As required by the application architecture</a:t>
+              <a:t>• data-sg: Allow port 1433 from logic-sg - This rule allows access to the Data Tier SQL Server database from the Logic Tier via port 1433, as required by the application architecture.</a:t>
             </a:r>
           </a:p>
         </p:txBody>
@@ -5029,8 +5013,8 @@
         </p:blipFill>
         <p:spPr>
           <a:xfrm>
-            <a:off x="182880" y="1321331"/>
-            <a:ext cx="5303520" cy="3026616"/>
+            <a:off x="182880" y="1406523"/>
+            <a:ext cx="5303520" cy="2856233"/>
           </a:xfrm>
           <a:prstGeom prst="rect">
             <a:avLst/>
@@ -5165,9 +5149,9 @@
           <a:p>
             <a:pPr>
               <a:spcAft>
-                <a:spcPts val="400"/>
+                <a:spcPts val="600"/>
               </a:spcAft>
-              <a:defRPr sz="800">
+              <a:defRPr sz="900">
                 <a:solidFill>
                   <a:srgbClr val="212121"/>
                 </a:solidFill>
@@ -5175,23 +5159,7 @@
               </a:defRPr>
             </a:pPr>
             <a:r>
-              <a:t>• Presentation-sg: Allow port 1433 from data-sg - This rule would allow access from the Data Tier to the Presentation Tier</a:t>
-            </a:r>
-          </a:p>
-          <a:p>
-            <a:pPr>
-              <a:spcAft>
-                <a:spcPts val="400"/>
-              </a:spcAft>
-              <a:defRPr sz="800">
-                <a:solidFill>
-                  <a:srgbClr val="212121"/>
-                </a:solidFill>
-                <a:latin typeface="Segoe UI"/>
-              </a:defRPr>
-            </a:pPr>
-            <a:r>
-              <a:t>• Is not necessary for the application's functionality</a:t>
+              <a:t>• presentation-sg: Allow port 1433 from data-sg - This rule would allow access from the Data Tier to the Presentation Tier, which is not necessary for the application's functionality.</a:t>
             </a:r>
           </a:p>
         </p:txBody>
@@ -5370,8 +5338,8 @@
         </p:blipFill>
         <p:spPr>
           <a:xfrm>
-            <a:off x="182880" y="1208198"/>
-            <a:ext cx="5303520" cy="3252882"/>
+            <a:off x="182880" y="1106378"/>
+            <a:ext cx="5303520" cy="3456522"/>
           </a:xfrm>
           <a:prstGeom prst="rect">
             <a:avLst/>
@@ -5506,9 +5474,9 @@
           <a:p>
             <a:pPr>
               <a:spcAft>
-                <a:spcPts val="400"/>
+                <a:spcPts val="600"/>
               </a:spcAft>
-              <a:defRPr sz="800">
+              <a:defRPr sz="900">
                 <a:solidFill>
                   <a:srgbClr val="212121"/>
                 </a:solidFill>
@@ -5516,7 +5484,7 @@
               </a:defRPr>
             </a:pPr>
             <a:r>
-              <a:t>• Logic-sg: Allow port 443 from presentation-sg - This rule allows access to the Logic Tier RESTful API from the Presentation Tier via HTTPS (port 443)</a:t>
+              <a:t>• logic-sg: Allow port 443 from presentation-sg - This rule allows access to the Logic Tier RESTful API from the Presentation Tier via HTTPS (port 443).</a:t>
             </a:r>
           </a:p>
         </p:txBody>
@@ -5695,8 +5663,8 @@
         </p:blipFill>
         <p:spPr>
           <a:xfrm>
-            <a:off x="182880" y="914400"/>
-            <a:ext cx="3950207" cy="3840480"/>
+            <a:off x="182880" y="1448281"/>
+            <a:ext cx="5303520" cy="2772717"/>
           </a:xfrm>
           <a:prstGeom prst="rect">
             <a:avLst/>
@@ -5831,9 +5799,9 @@
           <a:p>
             <a:pPr>
               <a:spcAft>
-                <a:spcPts val="400"/>
+                <a:spcPts val="600"/>
               </a:spcAft>
-              <a:defRPr sz="800">
+              <a:defRPr sz="900">
                 <a:solidFill>
                   <a:srgbClr val="212121"/>
                 </a:solidFill>
@@ -5841,15 +5809,15 @@
               </a:defRPr>
             </a:pPr>
             <a:r>
-              <a:t>• Logic-sg: Allow port 443 from 0.0.0.0/0 - This rule would allow access to the Logic Tier RESTful API over HTTPS from anywhere</a:t>
+              <a:t>• logic-sg: Allow port 443 from 0.</a:t>
             </a:r>
           </a:p>
           <a:p>
             <a:pPr>
               <a:spcAft>
-                <a:spcPts val="400"/>
+                <a:spcPts val="600"/>
               </a:spcAft>
-              <a:defRPr sz="800">
+              <a:defRPr sz="900">
                 <a:solidFill>
                   <a:srgbClr val="212121"/>
                 </a:solidFill>
@@ -5857,7 +5825,7 @@
               </a:defRPr>
             </a:pPr>
             <a:r>
-              <a:t>• May not align with the desired security posture</a:t>
+              <a:t>• 0.0.0/0 - This rule would allow access to the Logic Tier RESTful API over HTTPS from anywhere, which may not align with the desired security posture.</a:t>
             </a:r>
           </a:p>
         </p:txBody>
